--- a/docs/slides/Sunflower-VelesHack.pptx
+++ b/docs/slides/Sunflower-VelesHack.pptx
@@ -5383,7 +5383,7 @@
                 <a:cs typeface="Roboto"/>
                 <a:sym typeface="Roboto"/>
               </a:rPr>
-              <a:t>GreenCharge tells drivers where the clean power is. Sunflower makes GreenCharge go there itself.</a:t>
+              <a:t>Moves a running app to the computer with the cleanest power, without losing a request.</a:t>
             </a:r>
           </a:p>
           <a:p>
@@ -5409,7 +5409,7 @@
                 <a:cs typeface="Roboto"/>
                 <a:sym typeface="Roboto"/>
               </a:rPr>
-              <a:t>Challenge 3 · ENACT, Kubernetes Dynamic Adaptation</a:t>
+              <a:t>Challenge 3, ENACT: Kubernetes Dynamic Adaptation</a:t>
             </a:r>
           </a:p>
         </p:txBody>
@@ -5612,7 +5612,7 @@
                 <a:cs typeface="Roboto"/>
                 <a:sym typeface="Roboto"/>
               </a:rPr>
-              <a:t>docs/demo. It is the measured data, unedited.</a:t>
+              <a:t>docs/demo, drawn from the measured data, unedited.</a:t>
             </a:r>
           </a:p>
           <a:p>
@@ -5636,7 +5636,7 @@
                 <a:cs typeface="Roboto"/>
                 <a:sym typeface="Roboto"/>
               </a:rPr>
-              <a:t>Everything measured is in the repo: </a:t>
+              <a:t>The raw results: </a:t>
             </a:r>
             <a:r>
               <a:rPr lang="en" sz="1300">
@@ -5645,7 +5645,7 @@
                 <a:cs typeface="Roboto"/>
                 <a:sym typeface="Roboto"/>
               </a:rPr>
-              <a:t>evidence/ holds the raw result files behind every number we quote.</a:t>
+              <a:t>evidence/ holds the file behind every number we quote.</a:t>
             </a:r>
           </a:p>
           <a:p>
@@ -5880,7 +5880,7 @@
                 <a:cs typeface="Roboto"/>
                 <a:sym typeface="Roboto"/>
               </a:rPr>
-              <a:t>ENACT’s policy operator names the best machine for an app, and keeps that answer current as the grid changes.</a:t>
+              <a:t>ENACT’s policy operator names the best machine for an app and keeps that answer current as the grid changes.</a:t>
             </a:r>
           </a:p>
           <a:p>
@@ -5904,7 +5904,7 @@
                 <a:cs typeface="Roboto"/>
                 <a:sym typeface="Roboto"/>
               </a:rPr>
-              <a:t>Nothing acts on the answer after deploy day. </a:t>
+              <a:t>After deploy day the app does not follow. </a:t>
             </a:r>
             <a:r>
               <a:rPr lang="en" sz="1300">
@@ -5913,7 +5913,7 @@
                 <a:cs typeface="Roboto"/>
                 <a:sym typeface="Roboto"/>
               </a:rPr>
-              <a:t>The SDK pins the app once. When its machine’s power turns dirty, GreenCharge stays there, breaking its own green rule.</a:t>
+              <a:t>The SDK pins it once, so when its machine’s power turns dirty, GreenCharge stays there, below its own 60% rule.</a:t>
             </a:r>
           </a:p>
           <a:p>
@@ -5937,7 +5937,7 @@
                 <a:cs typeface="Roboto"/>
                 <a:sym typeface="Roboto"/>
               </a:rPr>
-              <a:t>Sunflower is a small controller that carries out ENACT’s choice. </a:t>
+              <a:t>Sunflower is a small controller that reads ENACT’s choice and moves the app to it, </a:t>
             </a:r>
             <a:r>
               <a:rPr lang="en" sz="1300">
@@ -5946,7 +5946,7 @@
                 <a:cs typeface="Roboto"/>
                 <a:sym typeface="Roboto"/>
               </a:rPr>
-              <a:t>It moves the app when the choice changes and the change lasts, without losing a request. It never chooses a machine itself.</a:t>
+              <a:t>once the change has lasted, without losing a request.</a:t>
             </a:r>
           </a:p>
           <a:p>
@@ -5970,7 +5970,7 @@
                 <a:cs typeface="Roboto"/>
                 <a:sym typeface="Roboto"/>
               </a:rPr>
-              <a:t>We did the challenge checklist through the ENACT SDK, then built Sunflower on top of it.</a:t>
+              <a:t>We completed the challenge checklist in the ENACT SDK first, then built Sunflower on top.</a:t>
             </a:r>
           </a:p>
         </p:txBody>
@@ -6029,7 +6029,7 @@
       </p:sp>
       <p:pic>
         <p:nvPicPr>
-          <p:cNvPr id="201" name="Race screen" descr="Two copies of GreenCharge over one replayed day of grid data: the standard build stays put, the copy with Sunflower moves."/>
+          <p:cNvPr id="201" name="Race screen" descr="Two copies of GreenCharge over one replayed day of grid data: the standard build stays on Machine A, the copy with Sunflower moves to Machine B."/>
           <p:cNvPicPr>
             <a:picLocks noChangeAspect="1"/>
           </p:cNvPicPr>
@@ -6044,7 +6044,7 @@
         <p:spPr>
           <a:xfrm>
             <a:off x="4352000" y="1235000"/>
-            <a:ext cx="4480000" cy="2507555"/>
+            <a:ext cx="4480000" cy="2488888"/>
           </a:xfrm>
           <a:prstGeom prst="rect">
             <a:avLst/>
@@ -6064,7 +6064,7 @@
         </p:nvSpPr>
         <p:spPr>
           <a:xfrm>
-            <a:off x="4352000" y="3812555"/>
+            <a:off x="4352000" y="3793888"/>
             <a:ext cx="4480000" cy="420000"/>
           </a:xfrm>
           <a:prstGeom prst="rect">
@@ -6103,7 +6103,7 @@
                 <a:cs typeface="Roboto"/>
                 <a:sym typeface="Roboto"/>
               </a:rPr>
-              <a:t>One real run on the challenge cluster. Each stitch is a request, coloured by the machine that answered. Top lane: standard build. Bottom lane: with Sunflower.</a:t>
+              <a:t>One real run on the challenge cluster. Left: the standard build, 48 s on dirty power. Right: with Sunflower, 12 s. Each was sent 507 requests and lost none.</a:t>
             </a:r>
           </a:p>
         </p:txBody>
@@ -6229,7 +6229,7 @@
                 <a:cs typeface="Roboto"/>
                 <a:sym typeface="Roboto"/>
               </a:rPr>
-              <a:t>Checklist done through the ENACT SDK: </a:t>
+              <a:t>Checklist done in the ENACT SDK: </a:t>
             </a:r>
             <a:r>
               <a:rPr lang="en" sz="1200">
@@ -6238,7 +6238,7 @@
                 <a:cs typeface="Roboto"/>
                 <a:sym typeface="Roboto"/>
               </a:rPr>
-              <a:t>policy model, Application Controller extension (14 tests), policy, packaging, deployment and monitoring, plus one step with the AI assistant. Screenshot of every step in the repo.</a:t>
+              <a:t>policy model, Application Controller extension (14 tests), policy, packaging, deployment and monitoring, plus one step with the SDK’s assistant. The repo has a screenshot of every step.</a:t>
             </a:r>
           </a:p>
           <a:p>
@@ -6262,7 +6262,7 @@
                 <a:cs typeface="Roboto"/>
                 <a:sym typeface="Roboto"/>
               </a:rPr>
-              <a:t>Sunflower follows, it does not decide: </a:t>
+              <a:t>ENACT stays in charge: </a:t>
             </a:r>
             <a:r>
               <a:rPr lang="en" sz="1200">
@@ -6271,7 +6271,7 @@
                 <a:cs typeface="Roboto"/>
                 <a:sym typeface="Roboto"/>
               </a:rPr>
-              <a:t>one annotation opts an app in. It waits out short dips, ignores near-ties, limits how often it moves, and undoes a move that fails.</a:t>
+              <a:t>Sunflower reads the policy’s chosen machine and has no ranking of its own. It waits out short dips, ignores near-ties, limits how often it moves, and undoes a move that fails.</a:t>
             </a:r>
           </a:p>
           <a:p>
@@ -6295,7 +6295,7 @@
                 <a:cs typeface="Roboto"/>
                 <a:sym typeface="Roboto"/>
               </a:rPr>
-              <a:t>Honest about what is open: </a:t>
+              <a:t>Still open: </a:t>
             </a:r>
             <a:r>
               <a:rPr lang="en" sz="1200">
@@ -6304,7 +6304,7 @@
                 <a:cs typeface="Roboto"/>
                 <a:sym typeface="Roboto"/>
               </a:rPr>
-              <a:t>the dataspace step is waiting on connector details from the mentors, and we make no carbon-saving claim, only time out of policy, which we measured.</a:t>
+              <a:t>the dataspace step, which needs connector details we have asked the mentors for. We make no carbon-saving claim. We report time on dirty power, which we measured.</a:t>
             </a:r>
           </a:p>
         </p:txBody>
@@ -6460,7 +6460,7 @@
                 <a:cs typeface="Roboto"/>
                 <a:sym typeface="Roboto"/>
               </a:rPr>
-              <a:t>across 30 moves in a row, 2,632 requests, on the challenge cluster</a:t>
+              <a:t>across 30 moves in a row, 1,777 requests, on the challenge cluster</a:t>
             </a:r>
           </a:p>
         </p:txBody>
@@ -6512,7 +6512,7 @@
                 <a:cs typeface="Roboto"/>
                 <a:sym typeface="Roboto"/>
               </a:rPr>
-              <a:t>48 → 13 s</a:t>
+              <a:t>48 → 12 s</a:t>
             </a:r>
           </a:p>
           <a:p>
@@ -6538,7 +6538,7 @@
                 <a:cs typeface="Roboto"/>
                 <a:sym typeface="Roboto"/>
               </a:rPr>
-              <a:t>breaking its green rule</a:t>
+              <a:t>on dirty power</a:t>
             </a:r>
           </a:p>
           <a:p>
@@ -6564,7 +6564,7 @@
                 <a:cs typeface="Roboto"/>
                 <a:sym typeface="Roboto"/>
               </a:rPr>
-              <a:t>standard build against Sunflower, over a real day of British grid data</a:t>
+              <a:t>standard build against Sunflower, over a real day of British grid data: 6 hours against 1.5</a:t>
             </a:r>
           </a:p>
         </p:txBody>
@@ -6668,7 +6668,7 @@
                 <a:cs typeface="Roboto"/>
                 <a:sym typeface="Roboto"/>
               </a:rPr>
-              <a:t>ENACT rough edges we hit, each written up with the fix we used</a:t>
+              <a:t>problems we hit in ENACT, each written up with the fix we used</a:t>
             </a:r>
           </a:p>
         </p:txBody>

--- a/docs/slides/Sunflower-VelesHack.pptx
+++ b/docs/slides/Sunflower-VelesHack.pptx
@@ -6192,8 +6192,8 @@
         </p:nvSpPr>
         <p:spPr>
           <a:xfrm>
-            <a:off x="311700" y="2700000"/>
-            <a:ext cx="8520600" cy="1900000"/>
+            <a:off x="311700" y="2560000"/>
+            <a:ext cx="8520600" cy="2060000"/>
           </a:xfrm>
           <a:prstGeom prst="rect">
             <a:avLst/>
@@ -6217,7 +6217,40 @@
                 <a:spcPts val="0"/>
               </a:spcBef>
               <a:spcAft>
-                <a:spcPts val="400"/>
+                <a:spcPts val="300"/>
+              </a:spcAft>
+              <a:buSzPts val="1300"/>
+              <a:buChar char="●"/>
+            </a:pPr>
+            <a:r>
+              <a:rPr lang="en" sz="1200" b="1">
+                <a:latin typeface="Roboto"/>
+                <a:ea typeface="Roboto"/>
+                <a:cs typeface="Roboto"/>
+                <a:sym typeface="Roboto"/>
+              </a:rPr>
+              <a:t>Where the 12 s go: </a:t>
+            </a:r>
+            <a:r>
+              <a:rPr lang="en" sz="1200">
+                <a:latin typeface="Roboto"/>
+                <a:ea typeface="Roboto"/>
+                <a:cs typeface="Roboto"/>
+                <a:sym typeface="Roboto"/>
+              </a:rPr>
+              <a:t>8 s is a deliberate wait to be sure the drop is real (a setting), and 3.5 s is the move. Both copies answer every request throughout.</a:t>
+            </a:r>
+          </a:p>
+          <a:p>
+            <a:pPr indent="-285750" marL="342900" lvl="0" rtl="0" algn="l">
+              <a:lnSpc>
+                <a:spcPct val="110000"/>
+              </a:lnSpc>
+              <a:spcBef>
+                <a:spcPts val="0"/>
+              </a:spcBef>
+              <a:spcAft>
+                <a:spcPts val="300"/>
               </a:spcAft>
               <a:buSzPts val="1300"/>
               <a:buChar char="●"/>
@@ -6250,7 +6283,7 @@
                 <a:spcPts val="0"/>
               </a:spcBef>
               <a:spcAft>
-                <a:spcPts val="400"/>
+                <a:spcPts val="300"/>
               </a:spcAft>
               <a:buSzPts val="1300"/>
               <a:buChar char="●"/>

--- a/docs/slides/Sunflower-VelesHack.pptx
+++ b/docs/slides/Sunflower-VelesHack.pptx
@@ -6238,7 +6238,7 @@
                 <a:cs typeface="Roboto"/>
                 <a:sym typeface="Roboto"/>
               </a:rPr>
-              <a:t>8 s is a deliberate wait to be sure the drop is real (a setting), and 3.5 s is the move. Both copies answer every request throughout.</a:t>
+              <a:t>8 s is a deliberate wait to be sure the drop is real, and 3.5 s is the move. Neither stretches with the day, so at real speed (default wait 20 s) Sunflower is on dirty power for about 24 seconds while the standard build sits through 6 hours.</a:t>
             </a:r>
           </a:p>
           <a:p>
@@ -6597,7 +6597,7 @@
                 <a:cs typeface="Roboto"/>
                 <a:sym typeface="Roboto"/>
               </a:rPr>
-              <a:t>standard build against Sunflower, over a real day of British grid data: 6 hours against 1.5</a:t>
+              <a:t>in the replay. At real speed: 6 hours for the standard build, about 24 seconds with Sunflower</a:t>
             </a:r>
           </a:p>
         </p:txBody>

--- a/docs/slides/Sunflower-VelesHack.pptx
+++ b/docs/slides/Sunflower-VelesHack.pptx
@@ -5678,7 +5678,7 @@
                 <a:cs typeface="Roboto"/>
                 <a:sym typeface="Roboto"/>
               </a:rPr>
-              <a:t>docs/field-report.md, 39 findings, each with the fix we used.</a:t>
+              <a:t>docs/field-report.md, 44 findings, each with the fix we used.</a:t>
             </a:r>
           </a:p>
           <a:p>
@@ -5970,7 +5970,7 @@
                 <a:cs typeface="Roboto"/>
                 <a:sym typeface="Roboto"/>
               </a:rPr>
-              <a:t>We completed the challenge checklist in the ENACT SDK first, then built Sunflower on top.</a:t>
+              <a:t>We completed all five items of the challenge checklist in the ENACT SDK, dataspace included, then built Sunflower on top.</a:t>
             </a:r>
           </a:p>
         </p:txBody>
@@ -6271,7 +6271,7 @@
                 <a:cs typeface="Roboto"/>
                 <a:sym typeface="Roboto"/>
               </a:rPr>
-              <a:t>policy model, Application Controller extension (14 tests), policy, packaging, deployment and monitoring, plus one step with the SDK’s assistant. The repo has a screenshot of every step.</a:t>
+              <a:t>dataspace feed, policy model, Application Controller extension (14 tests), policy, packaging, deployment and monitoring, plus one step with the SDK’s assistant. The repo has a screenshot of every step.</a:t>
             </a:r>
           </a:p>
           <a:p>
@@ -6328,7 +6328,7 @@
                 <a:cs typeface="Roboto"/>
                 <a:sym typeface="Roboto"/>
               </a:rPr>
-              <a:t>Still open: </a:t>
+              <a:t>What we do not claim: </a:t>
             </a:r>
             <a:r>
               <a:rPr lang="en" sz="1200">
@@ -6337,7 +6337,7 @@
                 <a:cs typeface="Roboto"/>
                 <a:sym typeface="Roboto"/>
               </a:rPr>
-              <a:t>the dataspace step, which needs connector details we have asked the mentors for. We make no carbon-saving claim. We report time on dirty power, which we measured.</a:t>
+              <a:t>carbon saved. This cluster reports energy as a model estimate, so we report time on dirty power, which we measured.</a:t>
             </a:r>
           </a:p>
         </p:txBody>
@@ -6649,7 +6649,7 @@
                 <a:cs typeface="Roboto"/>
                 <a:sym typeface="Roboto"/>
               </a:rPr>
-              <a:t>39</a:t>
+              <a:t>44</a:t>
             </a:r>
           </a:p>
           <a:p>

--- a/docs/slides/Sunflower-VelesHack.pptx
+++ b/docs/slides/Sunflower-VelesHack.pptx
@@ -5678,7 +5678,7 @@
                 <a:cs typeface="Roboto"/>
                 <a:sym typeface="Roboto"/>
               </a:rPr>
-              <a:t>docs/field-report.md, 44 findings, each with the fix we used.</a:t>
+              <a:t>docs/field-report.md, 45 findings, each with the fix we used.</a:t>
             </a:r>
           </a:p>
           <a:p>
@@ -6649,7 +6649,7 @@
                 <a:cs typeface="Roboto"/>
                 <a:sym typeface="Roboto"/>
               </a:rPr>
-              <a:t>44</a:t>
+              <a:t>45</a:t>
             </a:r>
           </a:p>
           <a:p>

--- a/docs/slides/Sunflower-VelesHack.pptx
+++ b/docs/slides/Sunflower-VelesHack.pptx
@@ -6103,7 +6103,7 @@
                 <a:cs typeface="Roboto"/>
                 <a:sym typeface="Roboto"/>
               </a:rPr>
-              <a:t>One real run on the challenge cluster. Left: the standard build, 48 s on dirty power. Right: with Sunflower, 12 s. Each was sent 507 requests and lost none.</a:t>
+              <a:t>One real run on the challenge cluster. Left: the standard build, 6 hours on dirty power at real speed. Right: with Sunflower, about 24 seconds. Each was sent 507 requests and lost none.</a:t>
             </a:r>
           </a:p>
         </p:txBody>
@@ -6229,7 +6229,7 @@
                 <a:cs typeface="Roboto"/>
                 <a:sym typeface="Roboto"/>
               </a:rPr>
-              <a:t>Where the 12 s go: </a:t>
+              <a:t>How we get 6 hours against 24 seconds: </a:t>
             </a:r>
             <a:r>
               <a:rPr lang="en" sz="1200">
@@ -6238,7 +6238,7 @@
                 <a:cs typeface="Roboto"/>
                 <a:sym typeface="Roboto"/>
               </a:rPr>
-              <a:t>8 s is a deliberate wait to be sure the drop is real, and 3.5 s is the move. Neither stretches with the day, so at real speed (default wait 20 s) Sunflower is on dirty power for about 24 seconds while the standard build sits through 6 hours.</a:t>
+              <a:t>our replay runs the day 450 times faster and shows 48 s against 12 s. The standard build’s 48 s are the whole dirty stretch, which is 6 hours at real speed. Sunflower’s 12 s are a wait and a 3.5 s move that do not stretch with the day: with its default 20 s wait, about 24 seconds.</a:t>
             </a:r>
           </a:p>
           <a:p>
@@ -6545,7 +6545,7 @@
                 <a:cs typeface="Roboto"/>
                 <a:sym typeface="Roboto"/>
               </a:rPr>
-              <a:t>48 → 12 s</a:t>
+              <a:t>6 h → 24 s</a:t>
             </a:r>
           </a:p>
           <a:p>
@@ -6571,7 +6571,7 @@
                 <a:cs typeface="Roboto"/>
                 <a:sym typeface="Roboto"/>
               </a:rPr>
-              <a:t>on dirty power</a:t>
+              <a:t>on dirty power, at real speed</a:t>
             </a:r>
           </a:p>
           <a:p>
@@ -6597,7 +6597,7 @@
                 <a:cs typeface="Roboto"/>
                 <a:sym typeface="Roboto"/>
               </a:rPr>
-              <a:t>in the replay. At real speed: 6 hours for the standard build, about 24 seconds with Sunflower</a:t>
+              <a:t>standard build against Sunflower, over a real day of British grid data</a:t>
             </a:r>
           </a:p>
         </p:txBody>

--- a/docs/slides/Sunflower-VelesHack.pptx
+++ b/docs/slides/Sunflower-VelesHack.pptx
@@ -5645,7 +5645,7 @@
                 <a:cs typeface="Roboto"/>
                 <a:sym typeface="Roboto"/>
               </a:rPr>
-              <a:t>evidence/ holds the file behind every number we quote.</a:t>
+              <a:t>evidence/ holds the file behind every number I quote.</a:t>
             </a:r>
           </a:p>
           <a:p>
@@ -5669,7 +5669,7 @@
                 <a:cs typeface="Roboto"/>
                 <a:sym typeface="Roboto"/>
               </a:rPr>
-              <a:t>What we are giving back to ENACT: </a:t>
+              <a:t>What I am giving back to ENACT: </a:t>
             </a:r>
             <a:r>
               <a:rPr lang="en" sz="1300">
@@ -5678,7 +5678,7 @@
                 <a:cs typeface="Roboto"/>
                 <a:sym typeface="Roboto"/>
               </a:rPr>
-              <a:t>docs/field-report.md, 45 findings, each with the fix we used.</a:t>
+              <a:t>docs/field-report.md, 45 findings, each with the fix I used.</a:t>
             </a:r>
           </a:p>
           <a:p>
@@ -5970,7 +5970,7 @@
                 <a:cs typeface="Roboto"/>
                 <a:sym typeface="Roboto"/>
               </a:rPr>
-              <a:t>We completed all five items of the challenge checklist in the ENACT SDK, dataspace included, then built Sunflower on top.</a:t>
+              <a:t>I completed all five items of the challenge checklist in the ENACT SDK, dataspace included, then built Sunflower on top.</a:t>
             </a:r>
           </a:p>
         </p:txBody>
@@ -6229,7 +6229,7 @@
                 <a:cs typeface="Roboto"/>
                 <a:sym typeface="Roboto"/>
               </a:rPr>
-              <a:t>How we get 6 hours against 24 seconds: </a:t>
+              <a:t>How I get 6 hours against 24 seconds: </a:t>
             </a:r>
             <a:r>
               <a:rPr lang="en" sz="1200">
@@ -6238,7 +6238,7 @@
                 <a:cs typeface="Roboto"/>
                 <a:sym typeface="Roboto"/>
               </a:rPr>
-              <a:t>our replay runs the day 450 times faster and shows 48 s against 12 s. The standard build’s 48 s are the whole dirty stretch, which is 6 hours at real speed. Sunflower’s 12 s are a wait and a 3.5 s move that do not stretch with the day: with its default 20 s wait, about 24 seconds.</a:t>
+              <a:t>my replay runs the day 450 times faster and shows 48 s against 12 s. The standard build’s 48 s are the whole dirty stretch, which is 6 hours at real speed. Sunflower’s 12 s are a wait and a 3.5 s move that do not stretch with the day: with its default 20 s wait, about 24 seconds.</a:t>
             </a:r>
           </a:p>
           <a:p>
@@ -6328,7 +6328,7 @@
                 <a:cs typeface="Roboto"/>
                 <a:sym typeface="Roboto"/>
               </a:rPr>
-              <a:t>What we do not claim: </a:t>
+              <a:t>What I do not claim: </a:t>
             </a:r>
             <a:r>
               <a:rPr lang="en" sz="1200">
@@ -6337,7 +6337,7 @@
                 <a:cs typeface="Roboto"/>
                 <a:sym typeface="Roboto"/>
               </a:rPr>
-              <a:t>carbon saved. This cluster reports energy as a model estimate, so we report time on dirty power, which we measured.</a:t>
+              <a:t>carbon saved. This cluster reports energy as a model estimate, so I report time on dirty power, which I measured.</a:t>
             </a:r>
           </a:p>
         </p:txBody>
@@ -6701,7 +6701,7 @@
                 <a:cs typeface="Roboto"/>
                 <a:sym typeface="Roboto"/>
               </a:rPr>
-              <a:t>problems we hit in ENACT, each written up with the fix we used</a:t>
+              <a:t>problems I hit in ENACT, each written up with the fix I used</a:t>
             </a:r>
           </a:p>
         </p:txBody>

--- a/docs/slides/Sunflower-VelesHack.pptx
+++ b/docs/slides/Sunflower-VelesHack.pptx
@@ -6307,39 +6307,6 @@
               <a:t>Sunflower reads the policy’s chosen machine and has no ranking of its own. It waits out short dips, ignores near-ties, limits how often it moves, and undoes a move that fails.</a:t>
             </a:r>
           </a:p>
-          <a:p>
-            <a:pPr indent="-285750" marL="342900" lvl="0" rtl="0" algn="l">
-              <a:lnSpc>
-                <a:spcPct val="110000"/>
-              </a:lnSpc>
-              <a:spcBef>
-                <a:spcPts val="0"/>
-              </a:spcBef>
-              <a:spcAft>
-                <a:spcPts val="0"/>
-              </a:spcAft>
-              <a:buSzPts val="1300"/>
-              <a:buChar char="●"/>
-            </a:pPr>
-            <a:r>
-              <a:rPr lang="en" sz="1200" b="1">
-                <a:latin typeface="Roboto"/>
-                <a:ea typeface="Roboto"/>
-                <a:cs typeface="Roboto"/>
-                <a:sym typeface="Roboto"/>
-              </a:rPr>
-              <a:t>What I do not claim: </a:t>
-            </a:r>
-            <a:r>
-              <a:rPr lang="en" sz="1200">
-                <a:latin typeface="Roboto"/>
-                <a:ea typeface="Roboto"/>
-                <a:cs typeface="Roboto"/>
-                <a:sym typeface="Roboto"/>
-              </a:rPr>
-              <a:t>carbon saved. This cluster reports energy as a model estimate, so I report time on dirty power, which I measured.</a:t>
-            </a:r>
-          </a:p>
         </p:txBody>
       </p:sp>
       <p:sp>
